--- a/design/samples/sales-pitch-sample.pptx
+++ b/design/samples/sales-pitch-sample.pptx
@@ -143,7 +143,7 @@
           </c:spPr>
           <c:invertIfNegative val="0"/>
           <c:dLbls>
-            <c:numFmt formatCode="#,##0" sourceLinked="0"/>
+            <c:numFmt formatCode="&quot;$&quot;0.0&quot;M&quot;" sourceLinked="0"/>
             <c:txPr>
               <a:bodyPr/>
               <a:lstStyle/>
@@ -205,7 +205,7 @@
           </c:val>
         </c:ser>
         <c:dLbls>
-          <c:numFmt formatCode="#,##0" sourceLinked="0"/>
+          <c:numFmt formatCode="&quot;$&quot;0.0&quot;M&quot;" sourceLinked="0"/>
           <c:txPr>
             <a:bodyPr/>
             <a:lstStyle/>
@@ -430,7 +430,7 @@
           </c:spPr>
           <c:invertIfNegative val="0"/>
           <c:dLbls>
-            <c:numFmt formatCode="#,##0" sourceLinked="0"/>
+            <c:numFmt formatCode="&quot;$&quot;0.0&quot;M&quot;" sourceLinked="0"/>
             <c:txPr>
               <a:bodyPr/>
               <a:lstStyle/>
@@ -492,7 +492,7 @@
           </c:val>
         </c:ser>
         <c:dLbls>
-          <c:numFmt formatCode="#,##0" sourceLinked="0"/>
+          <c:numFmt formatCode="&quot;$&quot;0.0&quot;M&quot;" sourceLinked="0"/>
           <c:txPr>
             <a:bodyPr/>
             <a:lstStyle/>
